--- a/m7/diapositivos/sessao-03-m7-f13.pptx
+++ b/m7/diapositivos/sessao-03-m7-f13.pptx
@@ -3139,7 +3139,7 @@
                 <a:ea typeface="Arial" pitchFamily="34" charset="-122"/>
                 <a:cs typeface="Arial" pitchFamily="34" charset="-120"/>
               </a:rPr>
-              <a:t>Espreita a lição seguinte, «Não sei se é sonho, se realidade»</a:t>
+              <a:t>Espreita a lição seguinte, «Chuva Oblíqua»</a:t>
             </a:r>
             <a:endParaRPr lang="en-US" sz="2200" dirty="0"/>
           </a:p>

--- a/m7/diapositivos/sessao-03-m7-f13.pptx
+++ b/m7/diapositivos/sessao-03-m7-f13.pptx
@@ -870,7 +870,7 @@
                 <a:ea typeface="Arial" pitchFamily="34" charset="-122"/>
                 <a:cs typeface="Arial" pitchFamily="34" charset="-120"/>
               </a:rPr>
-              <a:t>Lição M7-F13, Ela canta, pobre ceifeira</a:t>
+              <a:t>Lição M7-F13, «Ela canta, pobre ceifeira»</a:t>
             </a:r>
             <a:endParaRPr lang="en-US" sz="1000" dirty="0"/>
           </a:p>
@@ -1028,7 +1028,7 @@
                 <a:ea typeface="Arial" pitchFamily="34" charset="-122"/>
                 <a:cs typeface="Arial" pitchFamily="34" charset="-120"/>
               </a:rPr>
-              <a:t>Ela canta, pobre ceifeira</a:t>
+              <a:t>«Ela canta, pobre ceifeira»</a:t>
             </a:r>
             <a:endParaRPr lang="en-US" sz="3400" dirty="0"/>
           </a:p>
@@ -1398,7 +1398,7 @@
                 <a:ea typeface="Arial" pitchFamily="34" charset="-122"/>
                 <a:cs typeface="Arial" pitchFamily="34" charset="-120"/>
               </a:rPr>
-              <a:t>Lição M7-F13, Ela canta, pobre ceifeira</a:t>
+              <a:t>Lição M7-F13, «Ela canta, pobre ceifeira»</a:t>
             </a:r>
             <a:endParaRPr lang="en-US" sz="1000" dirty="0"/>
           </a:p>
@@ -2111,7 +2111,7 @@
                 <a:ea typeface="Arial" pitchFamily="34" charset="-122"/>
                 <a:cs typeface="Arial" pitchFamily="34" charset="-120"/>
               </a:rPr>
-              <a:t>Lição M7-F13, Ela canta, pobre ceifeira</a:t>
+              <a:t>Lição M7-F13, «Ela canta, pobre ceifeira»</a:t>
             </a:r>
             <a:endParaRPr lang="en-US" sz="1000" dirty="0"/>
           </a:p>
@@ -2734,7 +2734,7 @@
                 <a:ea typeface="Arial" pitchFamily="34" charset="-122"/>
                 <a:cs typeface="Arial" pitchFamily="34" charset="-120"/>
               </a:rPr>
-              <a:t>Lição M7-F13, Ela canta, pobre ceifeira</a:t>
+              <a:t>Lição M7-F13, «Ela canta, pobre ceifeira»</a:t>
             </a:r>
             <a:endParaRPr lang="en-US" sz="1000" dirty="0"/>
           </a:p>
@@ -3447,7 +3447,7 @@
                 <a:ea typeface="Arial" pitchFamily="34" charset="-122"/>
                 <a:cs typeface="Arial" pitchFamily="34" charset="-120"/>
               </a:rPr>
-              <a:t>Lição M7-F13, Ela canta, pobre ceifeira</a:t>
+              <a:t>Lição M7-F13, «Ela canta, pobre ceifeira»</a:t>
             </a:r>
             <a:endParaRPr lang="en-US" sz="1000" dirty="0"/>
           </a:p>
@@ -3726,7 +3726,7 @@
                 <a:ea typeface="Arial" pitchFamily="34" charset="-122"/>
                 <a:cs typeface="Arial" pitchFamily="34" charset="-120"/>
               </a:rPr>
-              <a:t>Lição M7-F13, Ela canta, pobre ceifeira</a:t>
+              <a:t>Lição M7-F13, «Ela canta, pobre ceifeira»</a:t>
             </a:r>
             <a:endParaRPr lang="en-US" sz="1000" dirty="0"/>
           </a:p>
@@ -4096,7 +4096,35 @@
                 <a:ea typeface="Arial" pitchFamily="34" charset="-122"/>
                 <a:cs typeface="Arial" pitchFamily="34" charset="-120"/>
               </a:rPr>
-              <a:t>Fernando Pessoa, Poesias, Ática, 1942, Arquivo Pessoa</a:t>
+              <a:t>Fernando Pessoa, </a:t>
+            </a:r>
+            <a:pPr indent="0" marL="0">
+              <a:buNone/>
+            </a:pPr>
+            <a:r>
+              <a:rPr lang="en-US" sz="1200" i="1" dirty="0">
+                <a:solidFill>
+                  <a:srgbClr val="A9A79F"/>
+                </a:solidFill>
+                <a:latin typeface="Arial" pitchFamily="34" charset="0"/>
+                <a:ea typeface="Arial" pitchFamily="34" charset="-122"/>
+                <a:cs typeface="Arial" pitchFamily="34" charset="-120"/>
+              </a:rPr>
+              <a:t>Poesias</a:t>
+            </a:r>
+            <a:pPr indent="0" marL="0">
+              <a:buNone/>
+            </a:pPr>
+            <a:r>
+              <a:rPr lang="en-US" sz="1200" dirty="0">
+                <a:solidFill>
+                  <a:srgbClr val="A9A79F"/>
+                </a:solidFill>
+                <a:latin typeface="Arial" pitchFamily="34" charset="0"/>
+                <a:ea typeface="Arial" pitchFamily="34" charset="-122"/>
+                <a:cs typeface="Arial" pitchFamily="34" charset="-120"/>
+              </a:rPr>
+              <a:t>, Ática, 1942, Arquivo Pessoa</a:t>
             </a:r>
             <a:endParaRPr lang="en-US" sz="1200" dirty="0"/>
           </a:p>
@@ -4206,7 +4234,7 @@
                 <a:ea typeface="Arial" pitchFamily="34" charset="-122"/>
                 <a:cs typeface="Arial" pitchFamily="34" charset="-120"/>
               </a:rPr>
-              <a:t>Lição M7-F13, Ela canta, pobre ceifeira</a:t>
+              <a:t>Lição M7-F13, «Ela canta, pobre ceifeira»</a:t>
             </a:r>
             <a:endParaRPr lang="en-US" sz="1000" dirty="0"/>
           </a:p>
@@ -4576,7 +4604,35 @@
                 <a:ea typeface="Arial" pitchFamily="34" charset="-122"/>
                 <a:cs typeface="Arial" pitchFamily="34" charset="-120"/>
               </a:rPr>
-              <a:t>Fernando Pessoa, Poesias, Ática, 1942, Arquivo Pessoa</a:t>
+              <a:t>Fernando Pessoa, </a:t>
+            </a:r>
+            <a:pPr indent="0" marL="0">
+              <a:buNone/>
+            </a:pPr>
+            <a:r>
+              <a:rPr lang="en-US" sz="1200" i="1" dirty="0">
+                <a:solidFill>
+                  <a:srgbClr val="A9A79F"/>
+                </a:solidFill>
+                <a:latin typeface="Arial" pitchFamily="34" charset="0"/>
+                <a:ea typeface="Arial" pitchFamily="34" charset="-122"/>
+                <a:cs typeface="Arial" pitchFamily="34" charset="-120"/>
+              </a:rPr>
+              <a:t>Poesias</a:t>
+            </a:r>
+            <a:pPr indent="0" marL="0">
+              <a:buNone/>
+            </a:pPr>
+            <a:r>
+              <a:rPr lang="en-US" sz="1200" dirty="0">
+                <a:solidFill>
+                  <a:srgbClr val="A9A79F"/>
+                </a:solidFill>
+                <a:latin typeface="Arial" pitchFamily="34" charset="0"/>
+                <a:ea typeface="Arial" pitchFamily="34" charset="-122"/>
+                <a:cs typeface="Arial" pitchFamily="34" charset="-120"/>
+              </a:rPr>
+              <a:t>, Ática, 1942, Arquivo Pessoa</a:t>
             </a:r>
             <a:endParaRPr lang="en-US" sz="1200" dirty="0"/>
           </a:p>
@@ -4686,7 +4742,7 @@
                 <a:ea typeface="Arial" pitchFamily="34" charset="-122"/>
                 <a:cs typeface="Arial" pitchFamily="34" charset="-120"/>
               </a:rPr>
-              <a:t>Lição M7-F13, Ela canta, pobre ceifeira</a:t>
+              <a:t>Lição M7-F13, «Ela canta, pobre ceifeira»</a:t>
             </a:r>
             <a:endParaRPr lang="en-US" sz="1000" dirty="0"/>
           </a:p>
@@ -5056,7 +5112,35 @@
                 <a:ea typeface="Arial" pitchFamily="34" charset="-122"/>
                 <a:cs typeface="Arial" pitchFamily="34" charset="-120"/>
               </a:rPr>
-              <a:t>Fernando Pessoa, Poesias, Ática, 1942, Arquivo Pessoa</a:t>
+              <a:t>Fernando Pessoa, </a:t>
+            </a:r>
+            <a:pPr indent="0" marL="0">
+              <a:buNone/>
+            </a:pPr>
+            <a:r>
+              <a:rPr lang="en-US" sz="1200" i="1" dirty="0">
+                <a:solidFill>
+                  <a:srgbClr val="A9A79F"/>
+                </a:solidFill>
+                <a:latin typeface="Arial" pitchFamily="34" charset="0"/>
+                <a:ea typeface="Arial" pitchFamily="34" charset="-122"/>
+                <a:cs typeface="Arial" pitchFamily="34" charset="-120"/>
+              </a:rPr>
+              <a:t>Poesias</a:t>
+            </a:r>
+            <a:pPr indent="0" marL="0">
+              <a:buNone/>
+            </a:pPr>
+            <a:r>
+              <a:rPr lang="en-US" sz="1200" dirty="0">
+                <a:solidFill>
+                  <a:srgbClr val="A9A79F"/>
+                </a:solidFill>
+                <a:latin typeface="Arial" pitchFamily="34" charset="0"/>
+                <a:ea typeface="Arial" pitchFamily="34" charset="-122"/>
+                <a:cs typeface="Arial" pitchFamily="34" charset="-120"/>
+              </a:rPr>
+              <a:t>, Ática, 1942, Arquivo Pessoa</a:t>
             </a:r>
             <a:endParaRPr lang="en-US" sz="1200" dirty="0"/>
           </a:p>
@@ -5166,7 +5250,7 @@
                 <a:ea typeface="Arial" pitchFamily="34" charset="-122"/>
                 <a:cs typeface="Arial" pitchFamily="34" charset="-120"/>
               </a:rPr>
-              <a:t>Lição M7-F13, Ela canta, pobre ceifeira</a:t>
+              <a:t>Lição M7-F13, «Ela canta, pobre ceifeira»</a:t>
             </a:r>
             <a:endParaRPr lang="en-US" sz="1000" dirty="0"/>
           </a:p>
@@ -5789,7 +5873,7 @@
                 <a:ea typeface="Arial" pitchFamily="34" charset="-122"/>
                 <a:cs typeface="Arial" pitchFamily="34" charset="-120"/>
               </a:rPr>
-              <a:t>Lição M7-F13, Ela canta, pobre ceifeira</a:t>
+              <a:t>Lição M7-F13, «Ela canta, pobre ceifeira»</a:t>
             </a:r>
             <a:endParaRPr lang="en-US" sz="1000" dirty="0"/>
           </a:p>
@@ -6856,7 +6940,7 @@
                 <a:ea typeface="Arial" pitchFamily="34" charset="-122"/>
                 <a:cs typeface="Arial" pitchFamily="34" charset="-120"/>
               </a:rPr>
-              <a:t>Lição M7-F13, Ela canta, pobre ceifeira</a:t>
+              <a:t>Lição M7-F13, «Ela canta, pobre ceifeira»</a:t>
             </a:r>
             <a:endParaRPr lang="en-US" sz="1000" dirty="0"/>
           </a:p>
@@ -7176,7 +7260,7 @@
                 <a:ea typeface="Arial" pitchFamily="34" charset="-122"/>
                 <a:cs typeface="Arial" pitchFamily="34" charset="-120"/>
               </a:rPr>
-              <a:t>Lição M7-F13, Ela canta, pobre ceifeira</a:t>
+              <a:t>Lição M7-F13, «Ela canta, pobre ceifeira»</a:t>
             </a:r>
             <a:endParaRPr lang="en-US" sz="1000" dirty="0"/>
           </a:p>

--- a/m7/diapositivos/sessao-03-m7-f13.pptx
+++ b/m7/diapositivos/sessao-03-m7-f13.pptx
@@ -4110,7 +4110,7 @@
                 <a:ea typeface="Arial" pitchFamily="34" charset="-122"/>
                 <a:cs typeface="Arial" pitchFamily="34" charset="-120"/>
               </a:rPr>
-              <a:t>Poesias</a:t>
+              <a:t>Athena</a:t>
             </a:r>
             <a:pPr indent="0" marL="0">
               <a:buNone/>
@@ -4124,7 +4124,7 @@
                 <a:ea typeface="Arial" pitchFamily="34" charset="-122"/>
                 <a:cs typeface="Arial" pitchFamily="34" charset="-120"/>
               </a:rPr>
-              <a:t>, Ática, 1942, Arquivo Pessoa</a:t>
+              <a:t>, n.º 3, 1924 (grafia atualizada)</a:t>
             </a:r>
             <a:endParaRPr lang="en-US" sz="1200" dirty="0"/>
           </a:p>
@@ -4463,7 +4463,7 @@
                 <a:ea typeface="Georgia" pitchFamily="34" charset="-122"/>
                 <a:cs typeface="Georgia" pitchFamily="34" charset="-120"/>
               </a:rPr>
-              <a:t>Mais razões para cantar que a vida.</a:t>
+              <a:t>Mais razões p'ra cantar que a vida.</a:t>
             </a:r>
             <a:endParaRPr lang="en-US" sz="2600" dirty="0"/>
           </a:p>
@@ -4523,7 +4523,7 @@
                 <a:ea typeface="Georgia" pitchFamily="34" charset="-122"/>
                 <a:cs typeface="Georgia" pitchFamily="34" charset="-120"/>
               </a:rPr>
-              <a:t>O que em mim sente está pensando.</a:t>
+              <a:t>O que em mim sente 'stá pensando.</a:t>
             </a:r>
             <a:endParaRPr lang="en-US" sz="2600" dirty="0"/>
           </a:p>
@@ -4618,7 +4618,7 @@
                 <a:ea typeface="Arial" pitchFamily="34" charset="-122"/>
                 <a:cs typeface="Arial" pitchFamily="34" charset="-120"/>
               </a:rPr>
-              <a:t>Poesias</a:t>
+              <a:t>Athena</a:t>
             </a:r>
             <a:pPr indent="0" marL="0">
               <a:buNone/>
@@ -4632,7 +4632,7 @@
                 <a:ea typeface="Arial" pitchFamily="34" charset="-122"/>
                 <a:cs typeface="Arial" pitchFamily="34" charset="-120"/>
               </a:rPr>
-              <a:t>, Ática, 1942, Arquivo Pessoa</a:t>
+              <a:t>, n.º 3, 1924 (grafia atualizada)</a:t>
             </a:r>
             <a:endParaRPr lang="en-US" sz="1200" dirty="0"/>
           </a:p>
@@ -4971,7 +4971,7 @@
                 <a:ea typeface="Georgia" pitchFamily="34" charset="-122"/>
                 <a:cs typeface="Georgia" pitchFamily="34" charset="-120"/>
               </a:rPr>
-              <a:t>Ó campo! Ó canção! A ciência</a:t>
+              <a:t>Ó campo! ó canção! A ciência</a:t>
             </a:r>
             <a:endParaRPr lang="en-US" sz="2600" dirty="0"/>
           </a:p>
@@ -5126,7 +5126,7 @@
                 <a:ea typeface="Arial" pitchFamily="34" charset="-122"/>
                 <a:cs typeface="Arial" pitchFamily="34" charset="-120"/>
               </a:rPr>
-              <a:t>Poesias</a:t>
+              <a:t>Athena</a:t>
             </a:r>
             <a:pPr indent="0" marL="0">
               <a:buNone/>
@@ -5140,7 +5140,7 @@
                 <a:ea typeface="Arial" pitchFamily="34" charset="-122"/>
                 <a:cs typeface="Arial" pitchFamily="34" charset="-120"/>
               </a:rPr>
-              <a:t>, Ática, 1942, Arquivo Pessoa</a:t>
+              <a:t>, n.º 3, 1924 (grafia atualizada)</a:t>
             </a:r>
             <a:endParaRPr lang="en-US" sz="1200" dirty="0"/>
           </a:p>
@@ -6546,7 +6546,7 @@
                           <a:ea typeface="Arial" pitchFamily="34" charset="-122"/>
                           <a:cs typeface="Arial" pitchFamily="34" charset="-120"/>
                         </a:rPr>
-                        <a:t>«Ó céu! / Ó campo! Ó canção!»</a:t>
+                        <a:t>«Ó céu! / Ó campo! ó canção!»</a:t>
                       </a:r>
                       <a:endParaRPr lang="en-US" sz="1800" dirty="0">
                         <a:latin typeface="Arial" charset="0"/>
@@ -6698,7 +6698,7 @@
                           <a:ea typeface="Arial" pitchFamily="34" charset="-122"/>
                           <a:cs typeface="Arial" pitchFamily="34" charset="-120"/>
                         </a:rPr>
-                        <a:t>«E canta como se tivesse / Mais razões para cantar que a vida»</a:t>
+                        <a:t>«E canta como se tivesse / Mais razões p'ra cantar que a vida»</a:t>
                       </a:r>
                       <a:endParaRPr lang="en-US" sz="1800" dirty="0">
                         <a:latin typeface="Arial" charset="0"/>

--- a/m7/diapositivos/sessao-03-m7-f13.pptx
+++ b/m7/diapositivos/sessao-03-m7-f13.pptx
@@ -4971,7 +4971,7 @@
                 <a:ea typeface="Georgia" pitchFamily="34" charset="-122"/>
                 <a:cs typeface="Georgia" pitchFamily="34" charset="-120"/>
               </a:rPr>
-              <a:t>Ó campo! ó canção! A ciência</a:t>
+              <a:t>Ó campo! Ó canção! A ciência</a:t>
             </a:r>
             <a:endParaRPr lang="en-US" sz="2600" dirty="0"/>
           </a:p>
@@ -6546,7 +6546,7 @@
                           <a:ea typeface="Arial" pitchFamily="34" charset="-122"/>
                           <a:cs typeface="Arial" pitchFamily="34" charset="-120"/>
                         </a:rPr>
-                        <a:t>«Ó céu! / Ó campo! ó canção!»</a:t>
+                        <a:t>«Ó céu! / Ó campo! Ó canção!»</a:t>
                       </a:r>
                       <a:endParaRPr lang="en-US" sz="1800" dirty="0">
                         <a:latin typeface="Arial" charset="0"/>
